--- a/builder/assets/reference-pages/hr-level-function-matrix.pptx
+++ b/builder/assets/reference-pages/hr-level-function-matrix.pptx
@@ -1097,7 +1097,7 @@
                   <a:srgbClr val="15375F"/>
                 </a:solidFill>
               </a:rPr>
-              <a:t>管理岗占比 14%、平均管理跨度 4.2 人，八层结构使决策链比同行长两级</a:t>
+              <a:t>Proportion of management positions 14%, average management span 4.2 People, the eight-layer structure makes the decision-making chain two levels longer than its peers</a:t>
             </a:r>
           </a:p>
         </p:txBody>
@@ -1186,7 +1186,7 @@
                   <a:srgbClr val="15375F"/>
                 </a:solidFill>
               </a:rPr>
-              <a:t>管理</a:t>
+              <a:t>management</a:t>
             </a:r>
           </a:p>
         </p:txBody>
@@ -1240,7 +1240,7 @@
                   <a:srgbClr val="15375F"/>
                 </a:solidFill>
               </a:rPr>
-              <a:t>技术</a:t>
+              <a:t>Technology</a:t>
             </a:r>
           </a:p>
         </p:txBody>
@@ -1294,7 +1294,7 @@
                   <a:srgbClr val="15375F"/>
                 </a:solidFill>
               </a:rPr>
-              <a:t>营销</a:t>
+              <a:t>Marketing</a:t>
             </a:r>
           </a:p>
         </p:txBody>
@@ -1348,7 +1348,7 @@
                   <a:srgbClr val="15375F"/>
                 </a:solidFill>
               </a:rPr>
-              <a:t>职能支持</a:t>
+              <a:t>functional support</a:t>
             </a:r>
           </a:p>
         </p:txBody>
@@ -1402,7 +1402,7 @@
                   <a:srgbClr val="15375F"/>
                 </a:solidFill>
               </a:rPr>
-              <a:t>操作</a:t>
+              <a:t>Operation</a:t>
             </a:r>
           </a:p>
         </p:txBody>
@@ -1548,7 +1548,7 @@
                   <a:srgbClr val="E8872D"/>
                 </a:solidFill>
               </a:rPr>
-              <a:t>12｜42万</a:t>
+              <a:t>12｜42million</a:t>
             </a:r>
           </a:p>
           <a:p xmlns:a="http://schemas.openxmlformats.org/drawingml/2006/main">
@@ -1565,7 +1565,7 @@
                   <a:srgbClr val="E8872D"/>
                 </a:solidFill>
               </a:rPr>
-              <a:t>9年司龄</a:t>
+              <a:t>9years old</a:t>
             </a:r>
           </a:p>
         </p:txBody>
@@ -1619,24 +1619,24 @@
                   <a:srgbClr val="172033"/>
                 </a:solidFill>
               </a:rPr>
-              <a:t>5｜41万</a:t>
-            </a:r>
-          </a:p>
-          <a:p xmlns:a="http://schemas.openxmlformats.org/drawingml/2006/main">
-            <a:pPr algn="ctr">
-              <a:defRPr sz="1600" b="0">
-                <a:solidFill>
-                  <a:srgbClr val="172033"/>
-                </a:solidFill>
-              </a:defRPr>
-            </a:pPr>
-            <a:r>
-              <a:rPr sz="1600" b="0">
-                <a:solidFill>
-                  <a:srgbClr val="172033"/>
-                </a:solidFill>
-              </a:rPr>
-              <a:t>9.2年司龄</a:t>
+              <a:t>5｜41million</a:t>
+            </a:r>
+          </a:p>
+          <a:p xmlns:a="http://schemas.openxmlformats.org/drawingml/2006/main">
+            <a:pPr algn="ctr">
+              <a:defRPr sz="1600" b="0">
+                <a:solidFill>
+                  <a:srgbClr val="172033"/>
+                </a:solidFill>
+              </a:defRPr>
+            </a:pPr>
+            <a:r>
+              <a:rPr sz="1600" b="0">
+                <a:solidFill>
+                  <a:srgbClr val="172033"/>
+                </a:solidFill>
+              </a:rPr>
+              <a:t>9.2years old</a:t>
             </a:r>
           </a:p>
         </p:txBody>
@@ -1690,7 +1690,7 @@
                   <a:srgbClr val="E8872D"/>
                 </a:solidFill>
               </a:rPr>
-              <a:t>断层</a:t>
+              <a:t>fault</a:t>
             </a:r>
           </a:p>
         </p:txBody>
@@ -1744,7 +1744,7 @@
                   <a:srgbClr val="E8872D"/>
                 </a:solidFill>
               </a:rPr>
-              <a:t>断层</a:t>
+              <a:t>fault</a:t>
             </a:r>
           </a:p>
         </p:txBody>
@@ -1798,7 +1798,7 @@
                   <a:srgbClr val="E8872D"/>
                 </a:solidFill>
               </a:rPr>
-              <a:t>断层</a:t>
+              <a:t>fault</a:t>
             </a:r>
           </a:p>
         </p:txBody>
@@ -1944,7 +1944,7 @@
                   <a:srgbClr val="E8872D"/>
                 </a:solidFill>
               </a:rPr>
-              <a:t>18｜38万</a:t>
+              <a:t>18｜38million</a:t>
             </a:r>
           </a:p>
           <a:p xmlns:a="http://schemas.openxmlformats.org/drawingml/2006/main">
@@ -1961,7 +1961,7 @@
                   <a:srgbClr val="E8872D"/>
                 </a:solidFill>
               </a:rPr>
-              <a:t>8.2年司龄</a:t>
+              <a:t>8.2years old</a:t>
             </a:r>
           </a:p>
         </p:txBody>
@@ -2015,24 +2015,24 @@
                   <a:srgbClr val="172033"/>
                 </a:solidFill>
               </a:rPr>
-              <a:t>12｜37万</a:t>
-            </a:r>
-          </a:p>
-          <a:p xmlns:a="http://schemas.openxmlformats.org/drawingml/2006/main">
-            <a:pPr algn="ctr">
-              <a:defRPr sz="1600" b="0">
-                <a:solidFill>
-                  <a:srgbClr val="172033"/>
-                </a:solidFill>
-              </a:defRPr>
-            </a:pPr>
-            <a:r>
-              <a:rPr sz="1600" b="0">
-                <a:solidFill>
-                  <a:srgbClr val="172033"/>
-                </a:solidFill>
-              </a:rPr>
-              <a:t>8.4年司龄</a:t>
+              <a:t>12｜37million</a:t>
+            </a:r>
+          </a:p>
+          <a:p xmlns:a="http://schemas.openxmlformats.org/drawingml/2006/main">
+            <a:pPr algn="ctr">
+              <a:defRPr sz="1600" b="0">
+                <a:solidFill>
+                  <a:srgbClr val="172033"/>
+                </a:solidFill>
+              </a:defRPr>
+            </a:pPr>
+            <a:r>
+              <a:rPr sz="1600" b="0">
+                <a:solidFill>
+                  <a:srgbClr val="172033"/>
+                </a:solidFill>
+              </a:rPr>
+              <a:t>8.4years old</a:t>
             </a:r>
           </a:p>
         </p:txBody>
@@ -2086,7 +2086,7 @@
                   <a:srgbClr val="E8872D"/>
                 </a:solidFill>
               </a:rPr>
-              <a:t>断层</a:t>
+              <a:t>fault</a:t>
             </a:r>
           </a:p>
         </p:txBody>
@@ -2140,7 +2140,7 @@
                   <a:srgbClr val="E8872D"/>
                 </a:solidFill>
               </a:rPr>
-              <a:t>断层</a:t>
+              <a:t>fault</a:t>
             </a:r>
           </a:p>
         </p:txBody>
@@ -2194,7 +2194,7 @@
                   <a:srgbClr val="E8872D"/>
                 </a:solidFill>
               </a:rPr>
-              <a:t>断层</a:t>
+              <a:t>fault</a:t>
             </a:r>
           </a:p>
         </p:txBody>
@@ -2340,7 +2340,7 @@
                   <a:srgbClr val="E8872D"/>
                 </a:solidFill>
               </a:rPr>
-              <a:t>26｜34万</a:t>
+              <a:t>26｜34million</a:t>
             </a:r>
           </a:p>
           <a:p xmlns:a="http://schemas.openxmlformats.org/drawingml/2006/main">
@@ -2357,7 +2357,7 @@
                   <a:srgbClr val="E8872D"/>
                 </a:solidFill>
               </a:rPr>
-              <a:t>7.4年司龄</a:t>
+              <a:t>7.4years old</a:t>
             </a:r>
           </a:p>
         </p:txBody>
@@ -2411,24 +2411,24 @@
                   <a:srgbClr val="172033"/>
                 </a:solidFill>
               </a:rPr>
-              <a:t>18｜33万</a:t>
-            </a:r>
-          </a:p>
-          <a:p xmlns:a="http://schemas.openxmlformats.org/drawingml/2006/main">
-            <a:pPr algn="ctr">
-              <a:defRPr sz="1600" b="0">
-                <a:solidFill>
-                  <a:srgbClr val="172033"/>
-                </a:solidFill>
-              </a:defRPr>
-            </a:pPr>
-            <a:r>
-              <a:rPr sz="1600" b="0">
-                <a:solidFill>
-                  <a:srgbClr val="172033"/>
-                </a:solidFill>
-              </a:rPr>
-              <a:t>7.6年司龄</a:t>
+              <a:t>18｜33million</a:t>
+            </a:r>
+          </a:p>
+          <a:p xmlns:a="http://schemas.openxmlformats.org/drawingml/2006/main">
+            <a:pPr algn="ctr">
+              <a:defRPr sz="1600" b="0">
+                <a:solidFill>
+                  <a:srgbClr val="172033"/>
+                </a:solidFill>
+              </a:defRPr>
+            </a:pPr>
+            <a:r>
+              <a:rPr sz="1600" b="0">
+                <a:solidFill>
+                  <a:srgbClr val="172033"/>
+                </a:solidFill>
+              </a:rPr>
+              <a:t>7.6years old</a:t>
             </a:r>
           </a:p>
         </p:txBody>
@@ -2482,24 +2482,24 @@
                   <a:srgbClr val="172033"/>
                 </a:solidFill>
               </a:rPr>
-              <a:t>4｜32万</a:t>
-            </a:r>
-          </a:p>
-          <a:p xmlns:a="http://schemas.openxmlformats.org/drawingml/2006/main">
-            <a:pPr algn="ctr">
-              <a:defRPr sz="1600" b="0">
-                <a:solidFill>
-                  <a:srgbClr val="172033"/>
-                </a:solidFill>
-              </a:defRPr>
-            </a:pPr>
-            <a:r>
-              <a:rPr sz="1600" b="0">
-                <a:solidFill>
-                  <a:srgbClr val="172033"/>
-                </a:solidFill>
-              </a:rPr>
-              <a:t>7.8年司龄</a:t>
+              <a:t>4｜32million</a:t>
+            </a:r>
+          </a:p>
+          <a:p xmlns:a="http://schemas.openxmlformats.org/drawingml/2006/main">
+            <a:pPr algn="ctr">
+              <a:defRPr sz="1600" b="0">
+                <a:solidFill>
+                  <a:srgbClr val="172033"/>
+                </a:solidFill>
+              </a:defRPr>
+            </a:pPr>
+            <a:r>
+              <a:rPr sz="1600" b="0">
+                <a:solidFill>
+                  <a:srgbClr val="172033"/>
+                </a:solidFill>
+              </a:rPr>
+              <a:t>7.8years old</a:t>
             </a:r>
           </a:p>
         </p:txBody>
@@ -2553,24 +2553,24 @@
                   <a:srgbClr val="172033"/>
                 </a:solidFill>
               </a:rPr>
-              <a:t>2｜31万</a:t>
-            </a:r>
-          </a:p>
-          <a:p xmlns:a="http://schemas.openxmlformats.org/drawingml/2006/main">
-            <a:pPr algn="ctr">
-              <a:defRPr sz="1600" b="0">
-                <a:solidFill>
-                  <a:srgbClr val="172033"/>
-                </a:solidFill>
-              </a:defRPr>
-            </a:pPr>
-            <a:r>
-              <a:rPr sz="1600" b="0">
-                <a:solidFill>
-                  <a:srgbClr val="172033"/>
-                </a:solidFill>
-              </a:rPr>
-              <a:t>8年司龄</a:t>
+              <a:t>2｜31million</a:t>
+            </a:r>
+          </a:p>
+          <a:p xmlns:a="http://schemas.openxmlformats.org/drawingml/2006/main">
+            <a:pPr algn="ctr">
+              <a:defRPr sz="1600" b="0">
+                <a:solidFill>
+                  <a:srgbClr val="172033"/>
+                </a:solidFill>
+              </a:defRPr>
+            </a:pPr>
+            <a:r>
+              <a:rPr sz="1600" b="0">
+                <a:solidFill>
+                  <a:srgbClr val="172033"/>
+                </a:solidFill>
+              </a:rPr>
+              <a:t>8years old</a:t>
             </a:r>
           </a:p>
         </p:txBody>
@@ -2624,7 +2624,7 @@
                   <a:srgbClr val="E8872D"/>
                 </a:solidFill>
               </a:rPr>
-              <a:t>断层</a:t>
+              <a:t>fault</a:t>
             </a:r>
           </a:p>
         </p:txBody>
@@ -2770,24 +2770,24 @@
                   <a:srgbClr val="172033"/>
                 </a:solidFill>
               </a:rPr>
-              <a:t>38｜30万</a:t>
-            </a:r>
-          </a:p>
-          <a:p xmlns:a="http://schemas.openxmlformats.org/drawingml/2006/main">
-            <a:pPr algn="ctr">
-              <a:defRPr sz="1600" b="0">
-                <a:solidFill>
-                  <a:srgbClr val="172033"/>
-                </a:solidFill>
-              </a:defRPr>
-            </a:pPr>
-            <a:r>
-              <a:rPr sz="1600" b="0">
-                <a:solidFill>
-                  <a:srgbClr val="172033"/>
-                </a:solidFill>
-              </a:rPr>
-              <a:t>6.6年司龄</a:t>
+              <a:t>38｜30million</a:t>
+            </a:r>
+          </a:p>
+          <a:p xmlns:a="http://schemas.openxmlformats.org/drawingml/2006/main">
+            <a:pPr algn="ctr">
+              <a:defRPr sz="1600" b="0">
+                <a:solidFill>
+                  <a:srgbClr val="172033"/>
+                </a:solidFill>
+              </a:defRPr>
+            </a:pPr>
+            <a:r>
+              <a:rPr sz="1600" b="0">
+                <a:solidFill>
+                  <a:srgbClr val="172033"/>
+                </a:solidFill>
+              </a:rPr>
+              <a:t>6.6years old</a:t>
             </a:r>
           </a:p>
         </p:txBody>
@@ -2841,24 +2841,24 @@
                   <a:srgbClr val="172033"/>
                 </a:solidFill>
               </a:rPr>
-              <a:t>40｜29万</a:t>
-            </a:r>
-          </a:p>
-          <a:p xmlns:a="http://schemas.openxmlformats.org/drawingml/2006/main">
-            <a:pPr algn="ctr">
-              <a:defRPr sz="1600" b="0">
-                <a:solidFill>
-                  <a:srgbClr val="172033"/>
-                </a:solidFill>
-              </a:defRPr>
-            </a:pPr>
-            <a:r>
-              <a:rPr sz="1600" b="0">
-                <a:solidFill>
-                  <a:srgbClr val="172033"/>
-                </a:solidFill>
-              </a:rPr>
-              <a:t>6.8年司龄</a:t>
+              <a:t>40｜29million</a:t>
+            </a:r>
+          </a:p>
+          <a:p xmlns:a="http://schemas.openxmlformats.org/drawingml/2006/main">
+            <a:pPr algn="ctr">
+              <a:defRPr sz="1600" b="0">
+                <a:solidFill>
+                  <a:srgbClr val="172033"/>
+                </a:solidFill>
+              </a:defRPr>
+            </a:pPr>
+            <a:r>
+              <a:rPr sz="1600" b="0">
+                <a:solidFill>
+                  <a:srgbClr val="172033"/>
+                </a:solidFill>
+              </a:rPr>
+              <a:t>6.8years old</a:t>
             </a:r>
           </a:p>
         </p:txBody>
@@ -2912,24 +2912,24 @@
                   <a:srgbClr val="172033"/>
                 </a:solidFill>
               </a:rPr>
-              <a:t>8｜28万</a:t>
-            </a:r>
-          </a:p>
-          <a:p xmlns:a="http://schemas.openxmlformats.org/drawingml/2006/main">
-            <a:pPr algn="ctr">
-              <a:defRPr sz="1600" b="0">
-                <a:solidFill>
-                  <a:srgbClr val="172033"/>
-                </a:solidFill>
-              </a:defRPr>
-            </a:pPr>
-            <a:r>
-              <a:rPr sz="1600" b="0">
-                <a:solidFill>
-                  <a:srgbClr val="172033"/>
-                </a:solidFill>
-              </a:rPr>
-              <a:t>7年司龄</a:t>
+              <a:t>8｜28million</a:t>
+            </a:r>
+          </a:p>
+          <a:p xmlns:a="http://schemas.openxmlformats.org/drawingml/2006/main">
+            <a:pPr algn="ctr">
+              <a:defRPr sz="1600" b="0">
+                <a:solidFill>
+                  <a:srgbClr val="172033"/>
+                </a:solidFill>
+              </a:defRPr>
+            </a:pPr>
+            <a:r>
+              <a:rPr sz="1600" b="0">
+                <a:solidFill>
+                  <a:srgbClr val="172033"/>
+                </a:solidFill>
+              </a:rPr>
+              <a:t>7years old</a:t>
             </a:r>
           </a:p>
         </p:txBody>
@@ -2983,24 +2983,24 @@
                   <a:srgbClr val="172033"/>
                 </a:solidFill>
               </a:rPr>
-              <a:t>6｜27万</a:t>
-            </a:r>
-          </a:p>
-          <a:p xmlns:a="http://schemas.openxmlformats.org/drawingml/2006/main">
-            <a:pPr algn="ctr">
-              <a:defRPr sz="1600" b="0">
-                <a:solidFill>
-                  <a:srgbClr val="172033"/>
-                </a:solidFill>
-              </a:defRPr>
-            </a:pPr>
-            <a:r>
-              <a:rPr sz="1600" b="0">
-                <a:solidFill>
-                  <a:srgbClr val="172033"/>
-                </a:solidFill>
-              </a:rPr>
-              <a:t>7.2年司龄</a:t>
+              <a:t>6｜27million</a:t>
+            </a:r>
+          </a:p>
+          <a:p xmlns:a="http://schemas.openxmlformats.org/drawingml/2006/main">
+            <a:pPr algn="ctr">
+              <a:defRPr sz="1600" b="0">
+                <a:solidFill>
+                  <a:srgbClr val="172033"/>
+                </a:solidFill>
+              </a:defRPr>
+            </a:pPr>
+            <a:r>
+              <a:rPr sz="1600" b="0">
+                <a:solidFill>
+                  <a:srgbClr val="172033"/>
+                </a:solidFill>
+              </a:rPr>
+              <a:t>7.2years old</a:t>
             </a:r>
           </a:p>
         </p:txBody>
@@ -3054,7 +3054,7 @@
                   <a:srgbClr val="E8872D"/>
                 </a:solidFill>
               </a:rPr>
-              <a:t>断层</a:t>
+              <a:t>fault</a:t>
             </a:r>
           </a:p>
         </p:txBody>
@@ -3162,24 +3162,24 @@
                   <a:srgbClr val="172033"/>
                 </a:solidFill>
               </a:rPr>
-              <a:t>50｜26万</a:t>
-            </a:r>
-          </a:p>
-          <a:p xmlns:a="http://schemas.openxmlformats.org/drawingml/2006/main">
-            <a:pPr algn="ctr">
-              <a:defRPr sz="1600" b="0">
-                <a:solidFill>
-                  <a:srgbClr val="172033"/>
-                </a:solidFill>
-              </a:defRPr>
-            </a:pPr>
-            <a:r>
-              <a:rPr sz="1600" b="0">
-                <a:solidFill>
-                  <a:srgbClr val="172033"/>
-                </a:solidFill>
-              </a:rPr>
-              <a:t>5.8年司龄</a:t>
+              <a:t>50｜26million</a:t>
+            </a:r>
+          </a:p>
+          <a:p xmlns:a="http://schemas.openxmlformats.org/drawingml/2006/main">
+            <a:pPr algn="ctr">
+              <a:defRPr sz="1600" b="0">
+                <a:solidFill>
+                  <a:srgbClr val="172033"/>
+                </a:solidFill>
+              </a:defRPr>
+            </a:pPr>
+            <a:r>
+              <a:rPr sz="1600" b="0">
+                <a:solidFill>
+                  <a:srgbClr val="172033"/>
+                </a:solidFill>
+              </a:rPr>
+              <a:t>5.8years old</a:t>
             </a:r>
           </a:p>
         </p:txBody>
@@ -3233,24 +3233,24 @@
                   <a:srgbClr val="172033"/>
                 </a:solidFill>
               </a:rPr>
-              <a:t>68｜25万</a:t>
-            </a:r>
-          </a:p>
-          <a:p xmlns:a="http://schemas.openxmlformats.org/drawingml/2006/main">
-            <a:pPr algn="ctr">
-              <a:defRPr sz="1600" b="0">
-                <a:solidFill>
-                  <a:srgbClr val="172033"/>
-                </a:solidFill>
-              </a:defRPr>
-            </a:pPr>
-            <a:r>
-              <a:rPr sz="1600" b="0">
-                <a:solidFill>
-                  <a:srgbClr val="172033"/>
-                </a:solidFill>
-              </a:rPr>
-              <a:t>6年司龄</a:t>
+              <a:t>68｜25million</a:t>
+            </a:r>
+          </a:p>
+          <a:p xmlns:a="http://schemas.openxmlformats.org/drawingml/2006/main">
+            <a:pPr algn="ctr">
+              <a:defRPr sz="1600" b="0">
+                <a:solidFill>
+                  <a:srgbClr val="172033"/>
+                </a:solidFill>
+              </a:defRPr>
+            </a:pPr>
+            <a:r>
+              <a:rPr sz="1600" b="0">
+                <a:solidFill>
+                  <a:srgbClr val="172033"/>
+                </a:solidFill>
+              </a:rPr>
+              <a:t>6years old</a:t>
             </a:r>
           </a:p>
         </p:txBody>
@@ -3304,24 +3304,24 @@
                   <a:srgbClr val="172033"/>
                 </a:solidFill>
               </a:rPr>
-              <a:t>15｜24万</a:t>
-            </a:r>
-          </a:p>
-          <a:p xmlns:a="http://schemas.openxmlformats.org/drawingml/2006/main">
-            <a:pPr algn="ctr">
-              <a:defRPr sz="1600" b="0">
-                <a:solidFill>
-                  <a:srgbClr val="172033"/>
-                </a:solidFill>
-              </a:defRPr>
-            </a:pPr>
-            <a:r>
-              <a:rPr sz="1600" b="0">
-                <a:solidFill>
-                  <a:srgbClr val="172033"/>
-                </a:solidFill>
-              </a:rPr>
-              <a:t>6.2年司龄</a:t>
+              <a:t>15｜24million</a:t>
+            </a:r>
+          </a:p>
+          <a:p xmlns:a="http://schemas.openxmlformats.org/drawingml/2006/main">
+            <a:pPr algn="ctr">
+              <a:defRPr sz="1600" b="0">
+                <a:solidFill>
+                  <a:srgbClr val="172033"/>
+                </a:solidFill>
+              </a:defRPr>
+            </a:pPr>
+            <a:r>
+              <a:rPr sz="1600" b="0">
+                <a:solidFill>
+                  <a:srgbClr val="172033"/>
+                </a:solidFill>
+              </a:rPr>
+              <a:t>6.2years old</a:t>
             </a:r>
           </a:p>
         </p:txBody>
@@ -3375,24 +3375,24 @@
                   <a:srgbClr val="172033"/>
                 </a:solidFill>
               </a:rPr>
-              <a:t>12｜23万</a:t>
-            </a:r>
-          </a:p>
-          <a:p xmlns:a="http://schemas.openxmlformats.org/drawingml/2006/main">
-            <a:pPr algn="ctr">
-              <a:defRPr sz="1600" b="0">
-                <a:solidFill>
-                  <a:srgbClr val="172033"/>
-                </a:solidFill>
-              </a:defRPr>
-            </a:pPr>
-            <a:r>
-              <a:rPr sz="1600" b="0">
-                <a:solidFill>
-                  <a:srgbClr val="172033"/>
-                </a:solidFill>
-              </a:rPr>
-              <a:t>6.4年司龄</a:t>
+              <a:t>12｜23million</a:t>
+            </a:r>
+          </a:p>
+          <a:p xmlns:a="http://schemas.openxmlformats.org/drawingml/2006/main">
+            <a:pPr algn="ctr">
+              <a:defRPr sz="1600" b="0">
+                <a:solidFill>
+                  <a:srgbClr val="172033"/>
+                </a:solidFill>
+              </a:defRPr>
+            </a:pPr>
+            <a:r>
+              <a:rPr sz="1600" b="0">
+                <a:solidFill>
+                  <a:srgbClr val="172033"/>
+                </a:solidFill>
+              </a:rPr>
+              <a:t>6.4years old</a:t>
             </a:r>
           </a:p>
         </p:txBody>
@@ -3446,24 +3446,24 @@
                   <a:srgbClr val="172033"/>
                 </a:solidFill>
               </a:rPr>
-              <a:t>8｜22万</a:t>
-            </a:r>
-          </a:p>
-          <a:p xmlns:a="http://schemas.openxmlformats.org/drawingml/2006/main">
-            <a:pPr algn="ctr">
-              <a:defRPr sz="1600" b="0">
-                <a:solidFill>
-                  <a:srgbClr val="172033"/>
-                </a:solidFill>
-              </a:defRPr>
-            </a:pPr>
-            <a:r>
-              <a:rPr sz="1600" b="0">
-                <a:solidFill>
-                  <a:srgbClr val="172033"/>
-                </a:solidFill>
-              </a:rPr>
-              <a:t>6.6年司龄</a:t>
+              <a:t>8｜22million</a:t>
+            </a:r>
+          </a:p>
+          <a:p xmlns:a="http://schemas.openxmlformats.org/drawingml/2006/main">
+            <a:pPr algn="ctr">
+              <a:defRPr sz="1600" b="0">
+                <a:solidFill>
+                  <a:srgbClr val="172033"/>
+                </a:solidFill>
+              </a:defRPr>
+            </a:pPr>
+            <a:r>
+              <a:rPr sz="1600" b="0">
+                <a:solidFill>
+                  <a:srgbClr val="172033"/>
+                </a:solidFill>
+              </a:rPr>
+              <a:t>6.6years old</a:t>
             </a:r>
           </a:p>
         </p:txBody>
@@ -3571,24 +3571,24 @@
                   <a:srgbClr val="172033"/>
                 </a:solidFill>
               </a:rPr>
-              <a:t>36｜22万</a:t>
-            </a:r>
-          </a:p>
-          <a:p xmlns:a="http://schemas.openxmlformats.org/drawingml/2006/main">
-            <a:pPr algn="ctr">
-              <a:defRPr sz="1600" b="0">
-                <a:solidFill>
-                  <a:srgbClr val="172033"/>
-                </a:solidFill>
-              </a:defRPr>
-            </a:pPr>
-            <a:r>
-              <a:rPr sz="1600" b="0">
-                <a:solidFill>
-                  <a:srgbClr val="172033"/>
-                </a:solidFill>
-              </a:rPr>
-              <a:t>5年司龄</a:t>
+              <a:t>36｜22million</a:t>
+            </a:r>
+          </a:p>
+          <a:p xmlns:a="http://schemas.openxmlformats.org/drawingml/2006/main">
+            <a:pPr algn="ctr">
+              <a:defRPr sz="1600" b="0">
+                <a:solidFill>
+                  <a:srgbClr val="172033"/>
+                </a:solidFill>
+              </a:defRPr>
+            </a:pPr>
+            <a:r>
+              <a:rPr sz="1600" b="0">
+                <a:solidFill>
+                  <a:srgbClr val="172033"/>
+                </a:solidFill>
+              </a:rPr>
+              <a:t>5years old</a:t>
             </a:r>
           </a:p>
         </p:txBody>
@@ -3642,24 +3642,24 @@
                   <a:srgbClr val="172033"/>
                 </a:solidFill>
               </a:rPr>
-              <a:t>96｜21万</a:t>
-            </a:r>
-          </a:p>
-          <a:p xmlns:a="http://schemas.openxmlformats.org/drawingml/2006/main">
-            <a:pPr algn="ctr">
-              <a:defRPr sz="1600" b="0">
-                <a:solidFill>
-                  <a:srgbClr val="172033"/>
-                </a:solidFill>
-              </a:defRPr>
-            </a:pPr>
-            <a:r>
-              <a:rPr sz="1600" b="0">
-                <a:solidFill>
-                  <a:srgbClr val="172033"/>
-                </a:solidFill>
-              </a:rPr>
-              <a:t>5.2年司龄</a:t>
+              <a:t>96｜21million</a:t>
+            </a:r>
+          </a:p>
+          <a:p xmlns:a="http://schemas.openxmlformats.org/drawingml/2006/main">
+            <a:pPr algn="ctr">
+              <a:defRPr sz="1600" b="0">
+                <a:solidFill>
+                  <a:srgbClr val="172033"/>
+                </a:solidFill>
+              </a:defRPr>
+            </a:pPr>
+            <a:r>
+              <a:rPr sz="1600" b="0">
+                <a:solidFill>
+                  <a:srgbClr val="172033"/>
+                </a:solidFill>
+              </a:rPr>
+              <a:t>5.2years old</a:t>
             </a:r>
           </a:p>
         </p:txBody>
@@ -3713,24 +3713,24 @@
                   <a:srgbClr val="172033"/>
                 </a:solidFill>
               </a:rPr>
-              <a:t>26｜20万</a:t>
-            </a:r>
-          </a:p>
-          <a:p xmlns:a="http://schemas.openxmlformats.org/drawingml/2006/main">
-            <a:pPr algn="ctr">
-              <a:defRPr sz="1600" b="0">
-                <a:solidFill>
-                  <a:srgbClr val="172033"/>
-                </a:solidFill>
-              </a:defRPr>
-            </a:pPr>
-            <a:r>
-              <a:rPr sz="1600" b="0">
-                <a:solidFill>
-                  <a:srgbClr val="172033"/>
-                </a:solidFill>
-              </a:rPr>
-              <a:t>5.4年司龄</a:t>
+              <a:t>26｜20million</a:t>
+            </a:r>
+          </a:p>
+          <a:p xmlns:a="http://schemas.openxmlformats.org/drawingml/2006/main">
+            <a:pPr algn="ctr">
+              <a:defRPr sz="1600" b="0">
+                <a:solidFill>
+                  <a:srgbClr val="172033"/>
+                </a:solidFill>
+              </a:defRPr>
+            </a:pPr>
+            <a:r>
+              <a:rPr sz="1600" b="0">
+                <a:solidFill>
+                  <a:srgbClr val="172033"/>
+                </a:solidFill>
+              </a:rPr>
+              <a:t>5.4years old</a:t>
             </a:r>
           </a:p>
         </p:txBody>
@@ -3784,24 +3784,24 @@
                   <a:srgbClr val="172033"/>
                 </a:solidFill>
               </a:rPr>
-              <a:t>24｜19万</a:t>
-            </a:r>
-          </a:p>
-          <a:p xmlns:a="http://schemas.openxmlformats.org/drawingml/2006/main">
-            <a:pPr algn="ctr">
-              <a:defRPr sz="1600" b="0">
-                <a:solidFill>
-                  <a:srgbClr val="172033"/>
-                </a:solidFill>
-              </a:defRPr>
-            </a:pPr>
-            <a:r>
-              <a:rPr sz="1600" b="0">
-                <a:solidFill>
-                  <a:srgbClr val="172033"/>
-                </a:solidFill>
-              </a:rPr>
-              <a:t>5.6年司龄</a:t>
+              <a:t>24｜19million</a:t>
+            </a:r>
+          </a:p>
+          <a:p xmlns:a="http://schemas.openxmlformats.org/drawingml/2006/main">
+            <a:pPr algn="ctr">
+              <a:defRPr sz="1600" b="0">
+                <a:solidFill>
+                  <a:srgbClr val="172033"/>
+                </a:solidFill>
+              </a:defRPr>
+            </a:pPr>
+            <a:r>
+              <a:rPr sz="1600" b="0">
+                <a:solidFill>
+                  <a:srgbClr val="172033"/>
+                </a:solidFill>
+              </a:rPr>
+              <a:t>5.6years old</a:t>
             </a:r>
           </a:p>
         </p:txBody>
@@ -3855,24 +3855,24 @@
                   <a:srgbClr val="172033"/>
                 </a:solidFill>
               </a:rPr>
-              <a:t>20｜18万</a:t>
-            </a:r>
-          </a:p>
-          <a:p xmlns:a="http://schemas.openxmlformats.org/drawingml/2006/main">
-            <a:pPr algn="ctr">
-              <a:defRPr sz="1600" b="0">
-                <a:solidFill>
-                  <a:srgbClr val="172033"/>
-                </a:solidFill>
-              </a:defRPr>
-            </a:pPr>
-            <a:r>
-              <a:rPr sz="1600" b="0">
-                <a:solidFill>
-                  <a:srgbClr val="172033"/>
-                </a:solidFill>
-              </a:rPr>
-              <a:t>5.8年司龄</a:t>
+              <a:t>20｜18million</a:t>
+            </a:r>
+          </a:p>
+          <a:p xmlns:a="http://schemas.openxmlformats.org/drawingml/2006/main">
+            <a:pPr algn="ctr">
+              <a:defRPr sz="1600" b="0">
+                <a:solidFill>
+                  <a:srgbClr val="172033"/>
+                </a:solidFill>
+              </a:defRPr>
+            </a:pPr>
+            <a:r>
+              <a:rPr sz="1600" b="0">
+                <a:solidFill>
+                  <a:srgbClr val="172033"/>
+                </a:solidFill>
+              </a:rPr>
+              <a:t>5.8years old</a:t>
             </a:r>
           </a:p>
         </p:txBody>
@@ -3980,24 +3980,24 @@
                   <a:srgbClr val="172033"/>
                 </a:solidFill>
               </a:rPr>
-              <a:t>18｜18万</a:t>
-            </a:r>
-          </a:p>
-          <a:p xmlns:a="http://schemas.openxmlformats.org/drawingml/2006/main">
-            <a:pPr algn="ctr">
-              <a:defRPr sz="1600" b="0">
-                <a:solidFill>
-                  <a:srgbClr val="172033"/>
-                </a:solidFill>
-              </a:defRPr>
-            </a:pPr>
-            <a:r>
-              <a:rPr sz="1600" b="0">
-                <a:solidFill>
-                  <a:srgbClr val="172033"/>
-                </a:solidFill>
-              </a:rPr>
-              <a:t>4.2年司龄</a:t>
+              <a:t>18｜18million</a:t>
+            </a:r>
+          </a:p>
+          <a:p xmlns:a="http://schemas.openxmlformats.org/drawingml/2006/main">
+            <a:pPr algn="ctr">
+              <a:defRPr sz="1600" b="0">
+                <a:solidFill>
+                  <a:srgbClr val="172033"/>
+                </a:solidFill>
+              </a:defRPr>
+            </a:pPr>
+            <a:r>
+              <a:rPr sz="1600" b="0">
+                <a:solidFill>
+                  <a:srgbClr val="172033"/>
+                </a:solidFill>
+              </a:rPr>
+              <a:t>4.2years old</a:t>
             </a:r>
           </a:p>
         </p:txBody>
@@ -4051,24 +4051,24 @@
                   <a:srgbClr val="172033"/>
                 </a:solidFill>
               </a:rPr>
-              <a:t>124｜17万</a:t>
-            </a:r>
-          </a:p>
-          <a:p xmlns:a="http://schemas.openxmlformats.org/drawingml/2006/main">
-            <a:pPr algn="ctr">
-              <a:defRPr sz="1600" b="0">
-                <a:solidFill>
-                  <a:srgbClr val="172033"/>
-                </a:solidFill>
-              </a:defRPr>
-            </a:pPr>
-            <a:r>
-              <a:rPr sz="1600" b="0">
-                <a:solidFill>
-                  <a:srgbClr val="172033"/>
-                </a:solidFill>
-              </a:rPr>
-              <a:t>4.4年司龄</a:t>
+              <a:t>124｜17million</a:t>
+            </a:r>
+          </a:p>
+          <a:p xmlns:a="http://schemas.openxmlformats.org/drawingml/2006/main">
+            <a:pPr algn="ctr">
+              <a:defRPr sz="1600" b="0">
+                <a:solidFill>
+                  <a:srgbClr val="172033"/>
+                </a:solidFill>
+              </a:defRPr>
+            </a:pPr>
+            <a:r>
+              <a:rPr sz="1600" b="0">
+                <a:solidFill>
+                  <a:srgbClr val="172033"/>
+                </a:solidFill>
+              </a:rPr>
+              <a:t>4.4years old</a:t>
             </a:r>
           </a:p>
         </p:txBody>
@@ -4122,24 +4122,24 @@
                   <a:srgbClr val="172033"/>
                 </a:solidFill>
               </a:rPr>
-              <a:t>42｜16万</a:t>
-            </a:r>
-          </a:p>
-          <a:p xmlns:a="http://schemas.openxmlformats.org/drawingml/2006/main">
-            <a:pPr algn="ctr">
-              <a:defRPr sz="1600" b="0">
-                <a:solidFill>
-                  <a:srgbClr val="172033"/>
-                </a:solidFill>
-              </a:defRPr>
-            </a:pPr>
-            <a:r>
-              <a:rPr sz="1600" b="0">
-                <a:solidFill>
-                  <a:srgbClr val="172033"/>
-                </a:solidFill>
-              </a:rPr>
-              <a:t>4.6年司龄</a:t>
+              <a:t>42｜16million</a:t>
+            </a:r>
+          </a:p>
+          <a:p xmlns:a="http://schemas.openxmlformats.org/drawingml/2006/main">
+            <a:pPr algn="ctr">
+              <a:defRPr sz="1600" b="0">
+                <a:solidFill>
+                  <a:srgbClr val="172033"/>
+                </a:solidFill>
+              </a:defRPr>
+            </a:pPr>
+            <a:r>
+              <a:rPr sz="1600" b="0">
+                <a:solidFill>
+                  <a:srgbClr val="172033"/>
+                </a:solidFill>
+              </a:rPr>
+              <a:t>4.6years old</a:t>
             </a:r>
           </a:p>
         </p:txBody>
@@ -4193,24 +4193,24 @@
                   <a:srgbClr val="172033"/>
                 </a:solidFill>
               </a:rPr>
-              <a:t>36｜15万</a:t>
-            </a:r>
-          </a:p>
-          <a:p xmlns:a="http://schemas.openxmlformats.org/drawingml/2006/main">
-            <a:pPr algn="ctr">
-              <a:defRPr sz="1600" b="0">
-                <a:solidFill>
-                  <a:srgbClr val="172033"/>
-                </a:solidFill>
-              </a:defRPr>
-            </a:pPr>
-            <a:r>
-              <a:rPr sz="1600" b="0">
-                <a:solidFill>
-                  <a:srgbClr val="172033"/>
-                </a:solidFill>
-              </a:rPr>
-              <a:t>4.8年司龄</a:t>
+              <a:t>36｜15million</a:t>
+            </a:r>
+          </a:p>
+          <a:p xmlns:a="http://schemas.openxmlformats.org/drawingml/2006/main">
+            <a:pPr algn="ctr">
+              <a:defRPr sz="1600" b="0">
+                <a:solidFill>
+                  <a:srgbClr val="172033"/>
+                </a:solidFill>
+              </a:defRPr>
+            </a:pPr>
+            <a:r>
+              <a:rPr sz="1600" b="0">
+                <a:solidFill>
+                  <a:srgbClr val="172033"/>
+                </a:solidFill>
+              </a:rPr>
+              <a:t>4.8years old</a:t>
             </a:r>
           </a:p>
         </p:txBody>
@@ -4264,24 +4264,24 @@
                   <a:srgbClr val="172033"/>
                 </a:solidFill>
               </a:rPr>
-              <a:t>48｜14万</a:t>
-            </a:r>
-          </a:p>
-          <a:p xmlns:a="http://schemas.openxmlformats.org/drawingml/2006/main">
-            <a:pPr algn="ctr">
-              <a:defRPr sz="1600" b="0">
-                <a:solidFill>
-                  <a:srgbClr val="172033"/>
-                </a:solidFill>
-              </a:defRPr>
-            </a:pPr>
-            <a:r>
-              <a:rPr sz="1600" b="0">
-                <a:solidFill>
-                  <a:srgbClr val="172033"/>
-                </a:solidFill>
-              </a:rPr>
-              <a:t>5年司龄</a:t>
+              <a:t>48｜14million</a:t>
+            </a:r>
+          </a:p>
+          <a:p xmlns:a="http://schemas.openxmlformats.org/drawingml/2006/main">
+            <a:pPr algn="ctr">
+              <a:defRPr sz="1600" b="0">
+                <a:solidFill>
+                  <a:srgbClr val="172033"/>
+                </a:solidFill>
+              </a:defRPr>
+            </a:pPr>
+            <a:r>
+              <a:rPr sz="1600" b="0">
+                <a:solidFill>
+                  <a:srgbClr val="172033"/>
+                </a:solidFill>
+              </a:rPr>
+              <a:t>5years old</a:t>
             </a:r>
           </a:p>
         </p:txBody>
@@ -4389,24 +4389,24 @@
                   <a:srgbClr val="172033"/>
                 </a:solidFill>
               </a:rPr>
-              <a:t>4｜14万</a:t>
-            </a:r>
-          </a:p>
-          <a:p xmlns:a="http://schemas.openxmlformats.org/drawingml/2006/main">
-            <a:pPr algn="ctr">
-              <a:defRPr sz="1600" b="0">
-                <a:solidFill>
-                  <a:srgbClr val="172033"/>
-                </a:solidFill>
-              </a:defRPr>
-            </a:pPr>
-            <a:r>
-              <a:rPr sz="1600" b="0">
-                <a:solidFill>
-                  <a:srgbClr val="172033"/>
-                </a:solidFill>
-              </a:rPr>
-              <a:t>3.4年司龄</a:t>
+              <a:t>4｜14million</a:t>
+            </a:r>
+          </a:p>
+          <a:p xmlns:a="http://schemas.openxmlformats.org/drawingml/2006/main">
+            <a:pPr algn="ctr">
+              <a:defRPr sz="1600" b="0">
+                <a:solidFill>
+                  <a:srgbClr val="172033"/>
+                </a:solidFill>
+              </a:defRPr>
+            </a:pPr>
+            <a:r>
+              <a:rPr sz="1600" b="0">
+                <a:solidFill>
+                  <a:srgbClr val="172033"/>
+                </a:solidFill>
+              </a:rPr>
+              <a:t>3.4years old</a:t>
             </a:r>
           </a:p>
         </p:txBody>
@@ -4460,24 +4460,24 @@
                   <a:srgbClr val="172033"/>
                 </a:solidFill>
               </a:rPr>
-              <a:t>62｜13万</a:t>
-            </a:r>
-          </a:p>
-          <a:p xmlns:a="http://schemas.openxmlformats.org/drawingml/2006/main">
-            <a:pPr algn="ctr">
-              <a:defRPr sz="1600" b="0">
-                <a:solidFill>
-                  <a:srgbClr val="172033"/>
-                </a:solidFill>
-              </a:defRPr>
-            </a:pPr>
-            <a:r>
-              <a:rPr sz="1600" b="0">
-                <a:solidFill>
-                  <a:srgbClr val="172033"/>
-                </a:solidFill>
-              </a:rPr>
-              <a:t>3.6年司龄</a:t>
+              <a:t>62｜13million</a:t>
+            </a:r>
+          </a:p>
+          <a:p xmlns:a="http://schemas.openxmlformats.org/drawingml/2006/main">
+            <a:pPr algn="ctr">
+              <a:defRPr sz="1600" b="0">
+                <a:solidFill>
+                  <a:srgbClr val="172033"/>
+                </a:solidFill>
+              </a:defRPr>
+            </a:pPr>
+            <a:r>
+              <a:rPr sz="1600" b="0">
+                <a:solidFill>
+                  <a:srgbClr val="172033"/>
+                </a:solidFill>
+              </a:rPr>
+              <a:t>3.6years old</a:t>
             </a:r>
           </a:p>
         </p:txBody>
@@ -4531,24 +4531,24 @@
                   <a:srgbClr val="172033"/>
                 </a:solidFill>
               </a:rPr>
-              <a:t>35｜12万</a:t>
-            </a:r>
-          </a:p>
-          <a:p xmlns:a="http://schemas.openxmlformats.org/drawingml/2006/main">
-            <a:pPr algn="ctr">
-              <a:defRPr sz="1600" b="0">
-                <a:solidFill>
-                  <a:srgbClr val="172033"/>
-                </a:solidFill>
-              </a:defRPr>
-            </a:pPr>
-            <a:r>
-              <a:rPr sz="1600" b="0">
-                <a:solidFill>
-                  <a:srgbClr val="172033"/>
-                </a:solidFill>
-              </a:rPr>
-              <a:t>3.8年司龄</a:t>
+              <a:t>35｜12million</a:t>
+            </a:r>
+          </a:p>
+          <a:p xmlns:a="http://schemas.openxmlformats.org/drawingml/2006/main">
+            <a:pPr algn="ctr">
+              <a:defRPr sz="1600" b="0">
+                <a:solidFill>
+                  <a:srgbClr val="172033"/>
+                </a:solidFill>
+              </a:defRPr>
+            </a:pPr>
+            <a:r>
+              <a:rPr sz="1600" b="0">
+                <a:solidFill>
+                  <a:srgbClr val="172033"/>
+                </a:solidFill>
+              </a:rPr>
+              <a:t>3.8years old</a:t>
             </a:r>
           </a:p>
         </p:txBody>
@@ -4602,24 +4602,24 @@
                   <a:srgbClr val="172033"/>
                 </a:solidFill>
               </a:rPr>
-              <a:t>41｜11万</a:t>
-            </a:r>
-          </a:p>
-          <a:p xmlns:a="http://schemas.openxmlformats.org/drawingml/2006/main">
-            <a:pPr algn="ctr">
-              <a:defRPr sz="1600" b="0">
-                <a:solidFill>
-                  <a:srgbClr val="172033"/>
-                </a:solidFill>
-              </a:defRPr>
-            </a:pPr>
-            <a:r>
-              <a:rPr sz="1600" b="0">
-                <a:solidFill>
-                  <a:srgbClr val="172033"/>
-                </a:solidFill>
-              </a:rPr>
-              <a:t>4年司龄</a:t>
+              <a:t>41｜11million</a:t>
+            </a:r>
+          </a:p>
+          <a:p xmlns:a="http://schemas.openxmlformats.org/drawingml/2006/main">
+            <a:pPr algn="ctr">
+              <a:defRPr sz="1600" b="0">
+                <a:solidFill>
+                  <a:srgbClr val="172033"/>
+                </a:solidFill>
+              </a:defRPr>
+            </a:pPr>
+            <a:r>
+              <a:rPr sz="1600" b="0">
+                <a:solidFill>
+                  <a:srgbClr val="172033"/>
+                </a:solidFill>
+              </a:rPr>
+              <a:t>4years old</a:t>
             </a:r>
           </a:p>
         </p:txBody>
@@ -4673,31 +4673,31 @@
                   <a:srgbClr val="172033"/>
                 </a:solidFill>
               </a:rPr>
-              <a:t>70｜10万</a:t>
-            </a:r>
-          </a:p>
-          <a:p xmlns:a="http://schemas.openxmlformats.org/drawingml/2006/main">
-            <a:pPr algn="ctr">
-              <a:defRPr sz="1600" b="0">
-                <a:solidFill>
-                  <a:srgbClr val="172033"/>
-                </a:solidFill>
-              </a:defRPr>
-            </a:pPr>
-            <a:r>
-              <a:rPr sz="1600" b="0">
-                <a:solidFill>
-                  <a:srgbClr val="172033"/>
-                </a:solidFill>
-              </a:rPr>
-              <a:t>4.2年司龄</a:t>
-            </a:r>
-          </a:p>
-        </p:txBody>
-      </p:sp>
-      <p:sp>
-        <p:nvSpPr>
-          <p:cNvPr id="60" name="管理洞察-rail">
+              <a:t>70｜10million</a:t>
+            </a:r>
+          </a:p>
+          <a:p xmlns:a="http://schemas.openxmlformats.org/drawingml/2006/main">
+            <a:pPr algn="ctr">
+              <a:defRPr sz="1600" b="0">
+                <a:solidFill>
+                  <a:srgbClr val="172033"/>
+                </a:solidFill>
+              </a:defRPr>
+            </a:pPr>
+            <a:r>
+              <a:rPr sz="1600" b="0">
+                <a:solidFill>
+                  <a:srgbClr val="172033"/>
+                </a:solidFill>
+              </a:rPr>
+              <a:t>4.2years old</a:t>
+            </a:r>
+          </a:p>
+        </p:txBody>
+      </p:sp>
+      <p:sp>
+        <p:nvSpPr>
+          <p:cNvPr id="60" name="management insights-rail">
             <a:extLst xmlns:a="http://schemas.openxmlformats.org/drawingml/2006/main">
               <a:ext uri="{FF2B5EF4-FFF2-40B4-BE49-F238E27FC236}">
                 <a16:creationId xmlns:a16="http://schemas.microsoft.com/office/drawing/2014/main" id="{70AC6704-1823-45E6-92BC-6136C80694BB}"/>
@@ -4732,7 +4732,7 @@
       </p:sp>
       <p:sp>
         <p:nvSpPr>
-          <p:cNvPr id="61" name="管理洞察-title">
+          <p:cNvPr id="61" name="management insights-title">
             <a:extLst xmlns:a="http://schemas.openxmlformats.org/drawingml/2006/main">
               <a:ext uri="{FF2B5EF4-FFF2-40B4-BE49-F238E27FC236}">
                 <a16:creationId xmlns:a16="http://schemas.microsoft.com/office/drawing/2014/main" id="{DBAA4A59-9864-4EAB-A02B-4EE0C71F0DF1}"/>
@@ -4775,14 +4775,14 @@
                   <a:srgbClr val="15375F"/>
                 </a:solidFill>
               </a:rPr>
-              <a:t>管理洞察</a:t>
-            </a:r>
-          </a:p>
-        </p:txBody>
-      </p:sp>
-      <p:sp>
-        <p:nvSpPr>
-          <p:cNvPr id="62" name="管理洞察-1">
+              <a:t>management insights</a:t>
+            </a:r>
+          </a:p>
+        </p:txBody>
+      </p:sp>
+      <p:sp>
+        <p:nvSpPr>
+          <p:cNvPr id="62" name="management insights-1">
             <a:extLst xmlns:a="http://schemas.openxmlformats.org/drawingml/2006/main">
               <a:ext uri="{FF2B5EF4-FFF2-40B4-BE49-F238E27FC236}">
                 <a16:creationId xmlns:a16="http://schemas.microsoft.com/office/drawing/2014/main" id="{38F315FA-02C4-43BB-BC22-1012225DA87D}"/>
@@ -4831,14 +4831,14 @@
                   <a:srgbClr val="172033"/>
                 </a:solidFill>
               </a:rPr>
-              <a:t>1  八层结构比同行多两层</a:t>
-            </a:r>
-          </a:p>
-        </p:txBody>
-      </p:sp>
-      <p:sp>
-        <p:nvSpPr>
-          <p:cNvPr id="63" name="管理洞察-2">
+              <a:t>1  The eight-story structure has two more floors than its peers.</a:t>
+            </a:r>
+          </a:p>
+        </p:txBody>
+      </p:sp>
+      <p:sp>
+        <p:nvSpPr>
+          <p:cNvPr id="63" name="management insights-2">
             <a:extLst xmlns:a="http://schemas.openxmlformats.org/drawingml/2006/main">
               <a:ext uri="{FF2B5EF4-FFF2-40B4-BE49-F238E27FC236}">
                 <a16:creationId xmlns:a16="http://schemas.microsoft.com/office/drawing/2014/main" id="{35078D25-AC96-4A92-8CD3-BB26972B4C6A}"/>
@@ -4887,14 +4887,14 @@
                   <a:srgbClr val="172033"/>
                 </a:solidFill>
               </a:rPr>
-              <a:t>2  中层管理跨度低于 4 人，存在层级冗余</a:t>
-            </a:r>
-          </a:p>
-        </p:txBody>
-      </p:sp>
-      <p:sp>
-        <p:nvSpPr>
-          <p:cNvPr id="64" name="管理洞察-3">
+              <a:t>2  Middle management span is less than 4 People, there is hierarchical redundancy</a:t>
+            </a:r>
+          </a:p>
+        </p:txBody>
+      </p:sp>
+      <p:sp>
+        <p:nvSpPr>
+          <p:cNvPr id="64" name="management insights-3">
             <a:extLst xmlns:a="http://schemas.openxmlformats.org/drawingml/2006/main">
               <a:ext uri="{FF2B5EF4-FFF2-40B4-BE49-F238E27FC236}">
                 <a16:creationId xmlns:a16="http://schemas.microsoft.com/office/drawing/2014/main" id="{70A01B3F-67EC-433B-8591-D70C41C53FA0}"/>
@@ -4943,7 +4943,7 @@
                   <a:srgbClr val="172033"/>
                 </a:solidFill>
               </a:rPr>
-              <a:t>3  技术序列在中高职级出现断层</a:t>
+              <a:t>3  There is a gap in the technical sequence at the middle and high levels</a:t>
             </a:r>
           </a:p>
         </p:txBody>
@@ -4999,7 +4999,7 @@
                   <a:srgbClr val="15375F"/>
                 </a:solidFill>
               </a:rPr>
-              <a:t>压缩至 6 层、管理岗占比降至 10%、技术序列增编 36 人</a:t>
+              <a:t>Compressed to 6 The proportion of senior and management positions has dropped to 10%, technical sequence addendum 36 people</a:t>
             </a:r>
           </a:p>
         </p:txBody>
